--- a/12/ppt/12-2_사용자_흐름_테스트와_시험_제출_v1.pptx
+++ b/12/ppt/12-2_사용자_흐름_테스트와_시험_제출_v1.pptx
@@ -2272,7 +2272,7 @@
                 <a:ea typeface="IBM Plex Sans KR" pitchFamily="34" charset="-122"/>
                 <a:cs typeface="IBM Plex Sans KR" pitchFamily="34" charset="-120"/>
               </a:rPr>
-              <a:t>교과서 12-2 · 13-14쪽</a:t>
+              <a:t>교과서 12-2 · 13-15쪽</a:t>
             </a:r>
             <a:endParaRPr lang="en-US" sz="900" dirty="0"/>
           </a:p>
@@ -2625,20 +2625,44 @@
           </a:p>
         </p:txBody>
       </p:sp>
-      <p:sp>
-        <p:nvSpPr>
-          <p:cNvPr id="10" name="Shape 8"/>
-          <p:cNvSpPr/>
-          <p:nvPr/>
-        </p:nvSpPr>
-        <p:spPr>
-          <a:xfrm>
-            <a:off x="530352" y="2103120"/>
-            <a:ext cx="5532120" cy="2286000"/>
+      <p:pic>
+        <p:nvPicPr>
+          <p:cNvPr id="10" name="Image 0" descr="/home/claude/w5/교과서_배포/assets/img/12-2-01-tangled.png">    </p:cNvPr>
+          <p:cNvPicPr>
+            <a:picLocks noChangeAspect="1"/>
+          </p:cNvPicPr>
+          <p:nvPr/>
+        </p:nvPicPr>
+        <p:blipFill>
+          <a:blip r:embed="rId1"/>
+          <a:stretch>
+            <a:fillRect/>
+          </a:stretch>
+        </p:blipFill>
+        <p:spPr>
+          <a:xfrm>
+            <a:off x="1307592" y="2011680"/>
+            <a:ext cx="5120640" cy="2880360"/>
+          </a:xfrm>
+          <a:prstGeom prst="rect">
+            <a:avLst/>
+          </a:prstGeom>
+        </p:spPr>
+      </p:pic>
+      <p:sp>
+        <p:nvSpPr>
+          <p:cNvPr id="11" name="Shape 8"/>
+          <p:cNvSpPr/>
+          <p:nvPr/>
+        </p:nvSpPr>
+        <p:spPr>
+          <a:xfrm>
+            <a:off x="7461504" y="2011680"/>
+            <a:ext cx="4389120" cy="1371600"/>
           </a:xfrm>
           <a:prstGeom prst="roundRect">
             <a:avLst>
-              <a:gd name="adj" fmla="val 2200"/>
+              <a:gd name="adj" fmla="val 3667"/>
             </a:avLst>
           </a:prstGeom>
           <a:solidFill>
@@ -2654,14 +2678,14 @@
       </p:sp>
       <p:sp>
         <p:nvSpPr>
-          <p:cNvPr id="11" name="Text 9"/>
-          <p:cNvSpPr/>
-          <p:nvPr/>
-        </p:nvSpPr>
-        <p:spPr>
-          <a:xfrm>
-            <a:off x="713232" y="2267712"/>
-            <a:ext cx="5166360" cy="329184"/>
+          <p:cNvPr id="12" name="Text 9"/>
+          <p:cNvSpPr/>
+          <p:nvPr/>
+        </p:nvSpPr>
+        <p:spPr>
+          <a:xfrm>
+            <a:off x="7644384" y="2176272"/>
+            <a:ext cx="4023360" cy="329184"/>
           </a:xfrm>
           <a:prstGeom prst="rect">
             <a:avLst/>
@@ -2693,14 +2717,14 @@
       </p:sp>
       <p:sp>
         <p:nvSpPr>
-          <p:cNvPr id="12" name="Text 10"/>
-          <p:cNvSpPr/>
-          <p:nvPr/>
-        </p:nvSpPr>
-        <p:spPr>
-          <a:xfrm>
-            <a:off x="713232" y="2688336"/>
-            <a:ext cx="5166360" cy="402336"/>
+          <p:cNvPr id="13" name="Text 10"/>
+          <p:cNvSpPr/>
+          <p:nvPr/>
+        </p:nvSpPr>
+        <p:spPr>
+          <a:xfrm>
+            <a:off x="7644384" y="2596896"/>
+            <a:ext cx="4023360" cy="402336"/>
           </a:xfrm>
           <a:prstGeom prst="rect">
             <a:avLst/>
@@ -2732,14 +2756,14 @@
       </p:sp>
       <p:sp>
         <p:nvSpPr>
-          <p:cNvPr id="13" name="Text 11"/>
-          <p:cNvSpPr/>
-          <p:nvPr/>
-        </p:nvSpPr>
-        <p:spPr>
-          <a:xfrm>
-            <a:off x="713232" y="3182112"/>
-            <a:ext cx="5166360" cy="1060704"/>
+          <p:cNvPr id="14" name="Text 11"/>
+          <p:cNvSpPr/>
+          <p:nvPr/>
+        </p:nvSpPr>
+        <p:spPr>
+          <a:xfrm>
+            <a:off x="7644384" y="3090672"/>
+            <a:ext cx="4023360" cy="146304"/>
           </a:xfrm>
           <a:prstGeom prst="rect">
             <a:avLst/>
@@ -2766,95 +2790,26 @@
                 <a:ea typeface="IBM Plex Sans KR" pitchFamily="34" charset="-122"/>
                 <a:cs typeface="IBM Plex Sans KR" pitchFamily="34" charset="-120"/>
               </a:rPr>
-              <a:t>2단계에서 버튼 글씨를 고치고</a:t>
+              <a:t>고치면서 테스트하면 무엇 때문인지 알 수 없다.</a:t>
             </a:r>
             <a:endParaRPr lang="en-US" sz="1250" dirty="0"/>
           </a:p>
-          <a:p>
-            <a:pPr indent="0" marL="0">
-              <a:lnSpc>
-                <a:spcPts val="1900"/>
-              </a:lnSpc>
-              <a:buNone/>
-            </a:pPr>
-            <a:r>
-              <a:rPr lang="en-US" sz="1250" dirty="0">
-                <a:solidFill>
-                  <a:srgbClr val="34373D"/>
-                </a:solidFill>
-                <a:latin typeface="IBM Plex Sans KR" pitchFamily="34" charset="0"/>
-                <a:ea typeface="IBM Plex Sans KR" pitchFamily="34" charset="-122"/>
-                <a:cs typeface="IBM Plex Sans KR" pitchFamily="34" charset="-120"/>
-              </a:rPr>
-              <a:t>3단계에서 배치를 고치고</a:t>
-            </a:r>
-            <a:endParaRPr lang="en-US" sz="1250" dirty="0"/>
-          </a:p>
-          <a:p>
-            <a:pPr indent="0" marL="0">
-              <a:lnSpc>
-                <a:spcPts val="1900"/>
-              </a:lnSpc>
-              <a:buNone/>
-            </a:pPr>
-            <a:r>
-              <a:rPr lang="en-US" sz="1250" dirty="0">
-                <a:solidFill>
-                  <a:srgbClr val="34373D"/>
-                </a:solidFill>
-                <a:latin typeface="IBM Plex Sans KR" pitchFamily="34" charset="0"/>
-                <a:ea typeface="IBM Plex Sans KR" pitchFamily="34" charset="-122"/>
-                <a:cs typeface="IBM Plex Sans KR" pitchFamily="34" charset="-120"/>
-              </a:rPr>
-              <a:t>그러다 기록이 사라진다.</a:t>
-            </a:r>
-            <a:endParaRPr lang="en-US" sz="1250" dirty="0"/>
-          </a:p>
-          <a:p>
-            <a:pPr indent="0" marL="0">
-              <a:lnSpc>
-                <a:spcPts val="1900"/>
-              </a:lnSpc>
-              <a:buNone/>
-            </a:pPr>
-            <a:endParaRPr lang="en-US" sz="1250" dirty="0"/>
-          </a:p>
-          <a:p>
-            <a:pPr indent="0" marL="0">
-              <a:lnSpc>
-                <a:spcPts val="1900"/>
-              </a:lnSpc>
-              <a:buNone/>
-            </a:pPr>
-            <a:r>
-              <a:rPr lang="en-US" sz="1250" dirty="0">
-                <a:solidFill>
-                  <a:srgbClr val="34373D"/>
-                </a:solidFill>
-                <a:latin typeface="IBM Plex Sans KR" pitchFamily="34" charset="0"/>
-                <a:ea typeface="IBM Plex Sans KR" pitchFamily="34" charset="-122"/>
-                <a:cs typeface="IBM Plex Sans KR" pitchFamily="34" charset="-120"/>
-              </a:rPr>
-              <a:t>무엇 때문인지 알 수 없다.</a:t>
-            </a:r>
-            <a:endParaRPr lang="en-US" sz="1250" dirty="0"/>
-          </a:p>
-        </p:txBody>
-      </p:sp>
-      <p:sp>
-        <p:nvSpPr>
-          <p:cNvPr id="14" name="Shape 12"/>
-          <p:cNvSpPr/>
-          <p:nvPr/>
-        </p:nvSpPr>
-        <p:spPr>
-          <a:xfrm>
-            <a:off x="6318504" y="2103120"/>
-            <a:ext cx="5532120" cy="2286000"/>
+        </p:txBody>
+      </p:sp>
+      <p:sp>
+        <p:nvSpPr>
+          <p:cNvPr id="15" name="Shape 12"/>
+          <p:cNvSpPr/>
+          <p:nvPr/>
+        </p:nvSpPr>
+        <p:spPr>
+          <a:xfrm>
+            <a:off x="7461504" y="3520440"/>
+            <a:ext cx="4389120" cy="1371600"/>
           </a:xfrm>
           <a:prstGeom prst="roundRect">
             <a:avLst>
-              <a:gd name="adj" fmla="val 2200"/>
+              <a:gd name="adj" fmla="val 3667"/>
             </a:avLst>
           </a:prstGeom>
           <a:solidFill>
@@ -2870,14 +2825,14 @@
       </p:sp>
       <p:sp>
         <p:nvSpPr>
-          <p:cNvPr id="15" name="Text 13"/>
-          <p:cNvSpPr/>
-          <p:nvPr/>
-        </p:nvSpPr>
-        <p:spPr>
-          <a:xfrm>
-            <a:off x="6501384" y="2267712"/>
-            <a:ext cx="5166360" cy="329184"/>
+          <p:cNvPr id="16" name="Text 13"/>
+          <p:cNvSpPr/>
+          <p:nvPr/>
+        </p:nvSpPr>
+        <p:spPr>
+          <a:xfrm>
+            <a:off x="7644384" y="3685032"/>
+            <a:ext cx="4023360" cy="329184"/>
           </a:xfrm>
           <a:prstGeom prst="rect">
             <a:avLst/>
@@ -2909,14 +2864,14 @@
       </p:sp>
       <p:sp>
         <p:nvSpPr>
-          <p:cNvPr id="16" name="Text 14"/>
-          <p:cNvSpPr/>
-          <p:nvPr/>
-        </p:nvSpPr>
-        <p:spPr>
-          <a:xfrm>
-            <a:off x="6501384" y="2688336"/>
-            <a:ext cx="5166360" cy="402336"/>
+          <p:cNvPr id="17" name="Text 14"/>
+          <p:cNvSpPr/>
+          <p:nvPr/>
+        </p:nvSpPr>
+        <p:spPr>
+          <a:xfrm>
+            <a:off x="7644384" y="4105656"/>
+            <a:ext cx="4023360" cy="402336"/>
           </a:xfrm>
           <a:prstGeom prst="rect">
             <a:avLst/>
@@ -2948,14 +2903,14 @@
       </p:sp>
       <p:sp>
         <p:nvSpPr>
-          <p:cNvPr id="17" name="Text 15"/>
-          <p:cNvSpPr/>
-          <p:nvPr/>
-        </p:nvSpPr>
-        <p:spPr>
-          <a:xfrm>
-            <a:off x="6501384" y="3182112"/>
-            <a:ext cx="5166360" cy="1060704"/>
+          <p:cNvPr id="18" name="Text 15"/>
+          <p:cNvSpPr/>
+          <p:nvPr/>
+        </p:nvSpPr>
+        <p:spPr>
+          <a:xfrm>
+            <a:off x="7644384" y="4599432"/>
+            <a:ext cx="4023360" cy="146304"/>
           </a:xfrm>
           <a:prstGeom prst="rect">
             <a:avLst/>
@@ -2982,19 +2937,38 @@
                 <a:ea typeface="IBM Plex Sans KR" pitchFamily="34" charset="-122"/>
                 <a:cs typeface="IBM Plex Sans KR" pitchFamily="34" charset="-120"/>
               </a:rPr>
-              <a:t>① 버전을 고정한다</a:t>
+              <a:t>고정 → 끝까지 실행 → 기록 → 한 가지만 수정</a:t>
             </a:r>
             <a:endParaRPr lang="en-US" sz="1250" dirty="0"/>
           </a:p>
-          <a:p>
-            <a:pPr indent="0" marL="0">
-              <a:lnSpc>
-                <a:spcPts val="1900"/>
-              </a:lnSpc>
-              <a:buNone/>
-            </a:pPr>
-            <a:r>
-              <a:rPr lang="en-US" sz="1250" dirty="0">
+        </p:txBody>
+      </p:sp>
+      <p:sp>
+        <p:nvSpPr>
+          <p:cNvPr id="19" name="Text 16"/>
+          <p:cNvSpPr/>
+          <p:nvPr/>
+        </p:nvSpPr>
+        <p:spPr>
+          <a:xfrm>
+            <a:off x="530352" y="5029200"/>
+            <a:ext cx="11128248" cy="457200"/>
+          </a:xfrm>
+          <a:prstGeom prst="rect">
+            <a:avLst/>
+          </a:prstGeom>
+          <a:noFill/>
+          <a:ln/>
+        </p:spPr>
+        <p:txBody>
+          <a:bodyPr wrap="square" lIns="0" tIns="0" rIns="0" bIns="0" rtlCol="0" anchor="ctr"/>
+          <a:lstStyle/>
+          <a:p>
+            <a:pPr algn="ctr" indent="0" marL="0">
+              <a:buNone/>
+            </a:pPr>
+            <a:r>
+              <a:rPr lang="en-US" sz="1700" b="1" dirty="0">
                 <a:solidFill>
                   <a:srgbClr val="34373D"/>
                 </a:solidFill>
@@ -3002,85 +2976,6 @@
                 <a:ea typeface="IBM Plex Sans KR" pitchFamily="34" charset="-122"/>
                 <a:cs typeface="IBM Plex Sans KR" pitchFamily="34" charset="-120"/>
               </a:rPr>
-              <a:t>② 끝까지 실행한다</a:t>
-            </a:r>
-            <a:endParaRPr lang="en-US" sz="1250" dirty="0"/>
-          </a:p>
-          <a:p>
-            <a:pPr indent="0" marL="0">
-              <a:lnSpc>
-                <a:spcPts val="1900"/>
-              </a:lnSpc>
-              <a:buNone/>
-            </a:pPr>
-            <a:r>
-              <a:rPr lang="en-US" sz="1250" dirty="0">
-                <a:solidFill>
-                  <a:srgbClr val="34373D"/>
-                </a:solidFill>
-                <a:latin typeface="IBM Plex Sans KR" pitchFamily="34" charset="0"/>
-                <a:ea typeface="IBM Plex Sans KR" pitchFamily="34" charset="-122"/>
-                <a:cs typeface="IBM Plex Sans KR" pitchFamily="34" charset="-120"/>
-              </a:rPr>
-              <a:t>③ 기록한다</a:t>
-            </a:r>
-            <a:endParaRPr lang="en-US" sz="1250" dirty="0"/>
-          </a:p>
-          <a:p>
-            <a:pPr indent="0" marL="0">
-              <a:lnSpc>
-                <a:spcPts val="1900"/>
-              </a:lnSpc>
-              <a:buNone/>
-            </a:pPr>
-            <a:r>
-              <a:rPr lang="en-US" sz="1250" dirty="0">
-                <a:solidFill>
-                  <a:srgbClr val="34373D"/>
-                </a:solidFill>
-                <a:latin typeface="IBM Plex Sans KR" pitchFamily="34" charset="0"/>
-                <a:ea typeface="IBM Plex Sans KR" pitchFamily="34" charset="-122"/>
-                <a:cs typeface="IBM Plex Sans KR" pitchFamily="34" charset="-120"/>
-              </a:rPr>
-              <a:t>④ 필요하면 한 가지만 고친다</a:t>
-            </a:r>
-            <a:endParaRPr lang="en-US" sz="1250" dirty="0"/>
-          </a:p>
-        </p:txBody>
-      </p:sp>
-      <p:sp>
-        <p:nvSpPr>
-          <p:cNvPr id="18" name="Text 16"/>
-          <p:cNvSpPr/>
-          <p:nvPr/>
-        </p:nvSpPr>
-        <p:spPr>
-          <a:xfrm>
-            <a:off x="530352" y="4754880"/>
-            <a:ext cx="11128248" cy="457200"/>
-          </a:xfrm>
-          <a:prstGeom prst="rect">
-            <a:avLst/>
-          </a:prstGeom>
-          <a:noFill/>
-          <a:ln/>
-        </p:spPr>
-        <p:txBody>
-          <a:bodyPr wrap="square" lIns="0" tIns="0" rIns="0" bIns="0" rtlCol="0" anchor="ctr"/>
-          <a:lstStyle/>
-          <a:p>
-            <a:pPr algn="ctr" indent="0" marL="0">
-              <a:buNone/>
-            </a:pPr>
-            <a:r>
-              <a:rPr lang="en-US" sz="1700" b="1" dirty="0">
-                <a:solidFill>
-                  <a:srgbClr val="34373D"/>
-                </a:solidFill>
-                <a:latin typeface="IBM Plex Sans KR" pitchFamily="34" charset="0"/>
-                <a:ea typeface="IBM Plex Sans KR" pitchFamily="34" charset="-122"/>
-                <a:cs typeface="IBM Plex Sans KR" pitchFamily="34" charset="-120"/>
-              </a:rPr>
               <a:t>실행 중에는 고치지 않는다 — 다 하고 나서 고친다</a:t>
             </a:r>
             <a:endParaRPr lang="en-US" sz="1700" dirty="0"/>
@@ -3089,7 +2984,7 @@
       </p:sp>
       <p:sp>
         <p:nvSpPr>
-          <p:cNvPr id="19" name="Shape 17"/>
+          <p:cNvPr id="20" name="Shape 17"/>
           <p:cNvSpPr/>
           <p:nvPr/>
         </p:nvSpPr>
@@ -3116,7 +3011,7 @@
       </p:sp>
       <p:sp>
         <p:nvSpPr>
-          <p:cNvPr id="20" name="Text 18"/>
+          <p:cNvPr id="21" name="Text 18"/>
           <p:cNvSpPr/>
           <p:nvPr/>
         </p:nvSpPr>
